--- a/media/resources/files/Onduktar_Kaytalanuuchu__Bolchokko_Almashtyruu_Sabak_65lzJdK.pptx
+++ b/media/resources/files/Onduktar_Kaytalanuuchu__Bolchokko_Almashtyruu_Sabak_65lzJdK.pptx
@@ -24245,7 +24245,7 @@
             </a:pPr>
             <a:r>
               <a:rPr lang="ru-RU" sz="3200" dirty="0"/>
-              <a:t>Турдуу пикирлер учун ыраазычылык билдиребиз.</a:t>
+              <a:t>Түрдүү пикирлер үчүн ыраазычылык билдиребиз.</a:t>
             </a:r>
           </a:p>
           <a:p>

--- a/media/resources/files/Onduktar_Kaytalanuuchu__Bolchokko_Almashtyruu_Sabak_65lzJdK.pptx
+++ b/media/resources/files/Onduktar_Kaytalanuuchu__Bolchokko_Almashtyruu_Sabak_65lzJdK.pptx
@@ -1138,7 +1138,7 @@
           <a:p>
             <a:r>
               <a:rPr lang="ru-RU" dirty="0"/>
-              <a:t>Бул ресурс математикалык ыкманын жандуу демонстрацияларын камсыз кылат.</a:t>
+              <a:t>Бул ресурс ыкманы жандуу көрсөтөт.</a:t>
             </a:r>
           </a:p>
           <a:p>
